--- a/NeuroWorld_LM_Conference_Presentation.pptx
+++ b/NeuroWorld_LM_Conference_Presentation.pptx
@@ -5173,7 +5173,7 @@
         <p:spPr>
           <a:xfrm>
             <a:off x="6967728" y="1527048"/>
-            <a:ext cx="4352544" cy="3385312"/>
+            <a:ext cx="4352544" cy="3280280"/>
           </a:xfrm>
           <a:prstGeom prst="rect">
             <a:avLst/>
@@ -5740,7 +5740,7 @@
         <p:spPr>
           <a:xfrm>
             <a:off x="6967728" y="1527048"/>
-            <a:ext cx="4352544" cy="2659888"/>
+            <a:ext cx="4352544" cy="2905848"/>
           </a:xfrm>
           <a:prstGeom prst="rect">
             <a:avLst/>
@@ -6299,7 +6299,7 @@
         <p:spPr>
           <a:xfrm>
             <a:off x="6967728" y="1527048"/>
-            <a:ext cx="4352544" cy="2901696"/>
+            <a:ext cx="4352544" cy="2774167"/>
           </a:xfrm>
           <a:prstGeom prst="rect">
             <a:avLst/>
@@ -6858,7 +6858,7 @@
         <p:spPr>
           <a:xfrm>
             <a:off x="6967728" y="1527048"/>
-            <a:ext cx="4352544" cy="2611526"/>
+            <a:ext cx="4352544" cy="2786064"/>
           </a:xfrm>
           <a:prstGeom prst="rect">
             <a:avLst/>
@@ -7417,7 +7417,7 @@
         <p:spPr>
           <a:xfrm>
             <a:off x="6967728" y="1527048"/>
-            <a:ext cx="4352544" cy="1632204"/>
+            <a:ext cx="4352544" cy="2229182"/>
           </a:xfrm>
           <a:prstGeom prst="rect">
             <a:avLst/>
@@ -7980,7 +7980,7 @@
         <p:spPr>
           <a:xfrm>
             <a:off x="6967728" y="1527048"/>
-            <a:ext cx="4352544" cy="2176272"/>
+            <a:ext cx="4352544" cy="2700269"/>
           </a:xfrm>
           <a:prstGeom prst="rect">
             <a:avLst/>
@@ -8531,7 +8531,7 @@
         <p:spPr>
           <a:xfrm>
             <a:off x="6967728" y="1527048"/>
-            <a:ext cx="4352544" cy="2659888"/>
+            <a:ext cx="4352544" cy="2697042"/>
           </a:xfrm>
           <a:prstGeom prst="rect">
             <a:avLst/>
@@ -9090,7 +9090,7 @@
         <p:spPr>
           <a:xfrm>
             <a:off x="6967728" y="1527048"/>
-            <a:ext cx="4352544" cy="2659888"/>
+            <a:ext cx="4352544" cy="2862392"/>
           </a:xfrm>
           <a:prstGeom prst="rect">
             <a:avLst/>
@@ -10271,7 +10271,7 @@
         <p:spPr>
           <a:xfrm>
             <a:off x="6967728" y="1527048"/>
-            <a:ext cx="4352544" cy="2659888"/>
+            <a:ext cx="4352544" cy="3038205"/>
           </a:xfrm>
           <a:prstGeom prst="rect">
             <a:avLst/>
@@ -12159,7 +12159,7 @@
         <p:spPr>
           <a:xfrm>
             <a:off x="6967728" y="1527048"/>
-            <a:ext cx="4352544" cy="2659888"/>
+            <a:ext cx="4352544" cy="3172293"/>
           </a:xfrm>
           <a:prstGeom prst="rect">
             <a:avLst/>
@@ -12718,7 +12718,7 @@
         <p:spPr>
           <a:xfrm>
             <a:off x="6967728" y="1527048"/>
-            <a:ext cx="4352544" cy="2560320"/>
+            <a:ext cx="4352544" cy="2836022"/>
           </a:xfrm>
           <a:prstGeom prst="rect">
             <a:avLst/>
@@ -13281,7 +13281,7 @@
         <p:spPr>
           <a:xfrm>
             <a:off x="6967728" y="1527048"/>
-            <a:ext cx="4352544" cy="1632204"/>
+            <a:ext cx="4352544" cy="2148159"/>
           </a:xfrm>
           <a:prstGeom prst="rect">
             <a:avLst/>
@@ -13836,7 +13836,7 @@
         <p:spPr>
           <a:xfrm>
             <a:off x="6967728" y="1527048"/>
-            <a:ext cx="4352544" cy="1632204"/>
+            <a:ext cx="4352544" cy="1656297"/>
           </a:xfrm>
           <a:prstGeom prst="rect">
             <a:avLst/>
@@ -14399,7 +14399,7 @@
         <p:spPr>
           <a:xfrm>
             <a:off x="6967728" y="1527048"/>
-            <a:ext cx="4352544" cy="3013300"/>
+            <a:ext cx="4352544" cy="2941106"/>
           </a:xfrm>
           <a:prstGeom prst="rect">
             <a:avLst/>
